--- a/output/wordlabs-in-prefix-3day.pptx
+++ b/output/wordlabs-in-prefix-3day.pptx
@@ -15573,11 +15573,11 @@
         <p:spPr>
           <a:xfrm>
             <a:off x="1874520" y="4096512"/>
-            <a:ext cx="6903720" cy="804672"/>
+            <a:ext cx="6903720" cy="658368"/>
           </a:xfrm>
           <a:prstGeom prst="rect">
             <a:avLst>
-              <a:gd name="adj" fmla="val 6818"/>
+              <a:gd name="adj" fmla="val 8333"/>
             </a:avLst>
           </a:prstGeom>
           <a:solidFill>
@@ -15600,11 +15600,11 @@
         <p:spPr>
           <a:xfrm>
             <a:off x="1951828" y="4169664"/>
-            <a:ext cx="603504" cy="384048"/>
+            <a:ext cx="603504" cy="475488"/>
           </a:xfrm>
           <a:prstGeom prst="rect">
             <a:avLst>
-              <a:gd name="adj" fmla="val 9524"/>
+              <a:gd name="adj" fmla="val 7692"/>
             </a:avLst>
           </a:prstGeom>
           <a:solidFill>
@@ -15627,7 +15627,7 @@
         <p:spPr>
           <a:xfrm>
             <a:off x="1951828" y="4169664"/>
-            <a:ext cx="603504" cy="384048"/>
+            <a:ext cx="603504" cy="475488"/>
           </a:xfrm>
           <a:prstGeom prst="rect">
             <a:avLst/>
@@ -15666,11 +15666,11 @@
         <p:spPr>
           <a:xfrm>
             <a:off x="2605209" y="4169664"/>
-            <a:ext cx="603504" cy="384048"/>
+            <a:ext cx="603504" cy="475488"/>
           </a:xfrm>
           <a:prstGeom prst="rect">
             <a:avLst>
-              <a:gd name="adj" fmla="val 9524"/>
+              <a:gd name="adj" fmla="val 7692"/>
             </a:avLst>
           </a:prstGeom>
           <a:solidFill>
@@ -15693,7 +15693,7 @@
         <p:spPr>
           <a:xfrm>
             <a:off x="2605209" y="4169664"/>
-            <a:ext cx="603504" cy="384048"/>
+            <a:ext cx="603504" cy="475488"/>
           </a:xfrm>
           <a:prstGeom prst="rect">
             <a:avLst/>
@@ -15732,11 +15732,11 @@
         <p:spPr>
           <a:xfrm>
             <a:off x="3258589" y="4169664"/>
-            <a:ext cx="603504" cy="384048"/>
+            <a:ext cx="603504" cy="475488"/>
           </a:xfrm>
           <a:prstGeom prst="rect">
             <a:avLst>
-              <a:gd name="adj" fmla="val 9524"/>
+              <a:gd name="adj" fmla="val 7692"/>
             </a:avLst>
           </a:prstGeom>
           <a:solidFill>
@@ -15759,7 +15759,7 @@
         <p:spPr>
           <a:xfrm>
             <a:off x="3258589" y="4169664"/>
-            <a:ext cx="603504" cy="384048"/>
+            <a:ext cx="603504" cy="475488"/>
           </a:xfrm>
           <a:prstGeom prst="rect">
             <a:avLst/>
@@ -15798,11 +15798,11 @@
         <p:spPr>
           <a:xfrm>
             <a:off x="3911969" y="4169664"/>
-            <a:ext cx="603504" cy="384048"/>
+            <a:ext cx="603504" cy="475488"/>
           </a:xfrm>
           <a:prstGeom prst="rect">
             <a:avLst>
-              <a:gd name="adj" fmla="val 9524"/>
+              <a:gd name="adj" fmla="val 7692"/>
             </a:avLst>
           </a:prstGeom>
           <a:solidFill>
@@ -15825,7 +15825,7 @@
         <p:spPr>
           <a:xfrm>
             <a:off x="3911969" y="4169664"/>
-            <a:ext cx="603504" cy="384048"/>
+            <a:ext cx="603504" cy="475488"/>
           </a:xfrm>
           <a:prstGeom prst="rect">
             <a:avLst/>
@@ -15864,11 +15864,11 @@
         <p:spPr>
           <a:xfrm>
             <a:off x="4565350" y="4169664"/>
-            <a:ext cx="603504" cy="384048"/>
+            <a:ext cx="603504" cy="475488"/>
           </a:xfrm>
           <a:prstGeom prst="rect">
             <a:avLst>
-              <a:gd name="adj" fmla="val 9524"/>
+              <a:gd name="adj" fmla="val 7692"/>
             </a:avLst>
           </a:prstGeom>
           <a:solidFill>
@@ -15891,7 +15891,7 @@
         <p:spPr>
           <a:xfrm>
             <a:off x="4565350" y="4169664"/>
-            <a:ext cx="603504" cy="384048"/>
+            <a:ext cx="603504" cy="475488"/>
           </a:xfrm>
           <a:prstGeom prst="rect">
             <a:avLst/>
@@ -15930,11 +15930,11 @@
         <p:spPr>
           <a:xfrm>
             <a:off x="5218730" y="4169664"/>
-            <a:ext cx="603504" cy="384048"/>
+            <a:ext cx="603504" cy="475488"/>
           </a:xfrm>
           <a:prstGeom prst="rect">
             <a:avLst>
-              <a:gd name="adj" fmla="val 9524"/>
+              <a:gd name="adj" fmla="val 7692"/>
             </a:avLst>
           </a:prstGeom>
           <a:solidFill>
@@ -15957,7 +15957,7 @@
         <p:spPr>
           <a:xfrm>
             <a:off x="5218730" y="4169664"/>
-            <a:ext cx="603504" cy="384048"/>
+            <a:ext cx="603504" cy="475488"/>
           </a:xfrm>
           <a:prstGeom prst="rect">
             <a:avLst/>
@@ -15996,11 +15996,11 @@
         <p:spPr>
           <a:xfrm>
             <a:off x="5872111" y="4169664"/>
-            <a:ext cx="603504" cy="384048"/>
+            <a:ext cx="603504" cy="475488"/>
           </a:xfrm>
           <a:prstGeom prst="rect">
             <a:avLst>
-              <a:gd name="adj" fmla="val 9524"/>
+              <a:gd name="adj" fmla="val 7692"/>
             </a:avLst>
           </a:prstGeom>
           <a:solidFill>
@@ -16023,7 +16023,7 @@
         <p:spPr>
           <a:xfrm>
             <a:off x="5872111" y="4169664"/>
-            <a:ext cx="603504" cy="384048"/>
+            <a:ext cx="603504" cy="475488"/>
           </a:xfrm>
           <a:prstGeom prst="rect">
             <a:avLst/>
@@ -16062,11 +16062,11 @@
         <p:spPr>
           <a:xfrm>
             <a:off x="6525491" y="4169664"/>
-            <a:ext cx="603504" cy="384048"/>
+            <a:ext cx="603504" cy="475488"/>
           </a:xfrm>
           <a:prstGeom prst="rect">
             <a:avLst>
-              <a:gd name="adj" fmla="val 9524"/>
+              <a:gd name="adj" fmla="val 7692"/>
             </a:avLst>
           </a:prstGeom>
           <a:solidFill>
@@ -16089,7 +16089,7 @@
         <p:spPr>
           <a:xfrm>
             <a:off x="6525491" y="4169664"/>
-            <a:ext cx="603504" cy="384048"/>
+            <a:ext cx="603504" cy="475488"/>
           </a:xfrm>
           <a:prstGeom prst="rect">
             <a:avLst/>
@@ -16113,7 +16113,7 @@
                 <a:ea typeface="Trebuchet MS" pitchFamily="34" charset="-122"/>
                 <a:cs typeface="Trebuchet MS" pitchFamily="34" charset="-120"/>
               </a:rPr>
-              <a:t>ee</a:t>
+              <a:t>e</a:t>
             </a:r>
             <a:endParaRPr lang="en-US" sz="900" dirty="0"/>
           </a:p>
@@ -16121,57 +16121,18 @@
       </p:sp>
       <p:sp>
         <p:nvSpPr>
-          <p:cNvPr id="52" name="Text 50"/>
-          <p:cNvSpPr/>
-          <p:nvPr/>
-        </p:nvSpPr>
-        <p:spPr>
-          <a:xfrm>
-            <a:off x="6525491" y="4572000"/>
-            <a:ext cx="603504" cy="219456"/>
-          </a:xfrm>
-          <a:prstGeom prst="rect">
-            <a:avLst/>
-          </a:prstGeom>
-          <a:noFill/>
-          <a:ln/>
-        </p:spPr>
-        <p:txBody>
-          <a:bodyPr wrap="square" lIns="0" tIns="0" rIns="0" bIns="0" rtlCol="0" anchor="t"/>
-          <a:lstStyle/>
-          <a:p>
-            <a:pPr algn="ctr" indent="0" marL="0">
-              <a:buNone/>
-            </a:pPr>
-            <a:r>
-              <a:rPr lang="en-US" sz="750" i="1" dirty="0">
-                <a:solidFill>
-                  <a:srgbClr val="94A3B8"/>
-                </a:solidFill>
-                <a:latin typeface="Calibri" pitchFamily="34" charset="0"/>
-                <a:ea typeface="Calibri" pitchFamily="34" charset="-122"/>
-                <a:cs typeface="Calibri" pitchFamily="34" charset="-120"/>
-              </a:rPr>
-              <a:t>/ee/</a:t>
-            </a:r>
-            <a:endParaRPr lang="en-US" sz="750" dirty="0"/>
-          </a:p>
-        </p:txBody>
-      </p:sp>
-      <p:sp>
-        <p:nvSpPr>
-          <p:cNvPr id="53" name="Shape 51"/>
+          <p:cNvPr id="52" name="Shape 50"/>
           <p:cNvSpPr/>
           <p:nvPr/>
         </p:nvSpPr>
         <p:spPr>
           <a:xfrm>
             <a:off x="7178871" y="4169664"/>
-            <a:ext cx="603504" cy="384048"/>
+            <a:ext cx="603504" cy="475488"/>
           </a:xfrm>
           <a:prstGeom prst="rect">
             <a:avLst>
-              <a:gd name="adj" fmla="val 9524"/>
+              <a:gd name="adj" fmla="val 7692"/>
             </a:avLst>
           </a:prstGeom>
           <a:solidFill>
@@ -16187,14 +16148,14 @@
       </p:sp>
       <p:sp>
         <p:nvSpPr>
-          <p:cNvPr id="54" name="Text 52"/>
+          <p:cNvPr id="53" name="Text 51"/>
           <p:cNvSpPr/>
           <p:nvPr/>
         </p:nvSpPr>
         <p:spPr>
           <a:xfrm>
             <a:off x="7178871" y="4169664"/>
-            <a:ext cx="603504" cy="384048"/>
+            <a:ext cx="603504" cy="475488"/>
           </a:xfrm>
           <a:prstGeom prst="rect">
             <a:avLst/>
@@ -16226,18 +16187,18 @@
       </p:sp>
       <p:sp>
         <p:nvSpPr>
-          <p:cNvPr id="55" name="Shape 53"/>
+          <p:cNvPr id="54" name="Shape 52"/>
           <p:cNvSpPr/>
           <p:nvPr/>
         </p:nvSpPr>
         <p:spPr>
           <a:xfrm>
             <a:off x="7832252" y="4169664"/>
-            <a:ext cx="603504" cy="384048"/>
+            <a:ext cx="603504" cy="475488"/>
           </a:xfrm>
           <a:prstGeom prst="rect">
             <a:avLst>
-              <a:gd name="adj" fmla="val 9524"/>
+              <a:gd name="adj" fmla="val 7692"/>
             </a:avLst>
           </a:prstGeom>
           <a:solidFill>
@@ -16253,14 +16214,14 @@
       </p:sp>
       <p:sp>
         <p:nvSpPr>
-          <p:cNvPr id="56" name="Text 54"/>
+          <p:cNvPr id="55" name="Text 53"/>
           <p:cNvSpPr/>
           <p:nvPr/>
         </p:nvSpPr>
         <p:spPr>
           <a:xfrm>
             <a:off x="7832252" y="4169664"/>
-            <a:ext cx="603504" cy="384048"/>
+            <a:ext cx="603504" cy="475488"/>
           </a:xfrm>
           <a:prstGeom prst="rect">
             <a:avLst/>
@@ -37976,7 +37937,7 @@
                 <a:ea typeface="Calibri" pitchFamily="34" charset="-122"/>
                 <a:cs typeface="Calibri" pitchFamily="34" charset="-120"/>
               </a:rPr>
-              <a:t>1.  The prefix 'in-' can mean 'not' or 'without'.</a:t>
+              <a:t>1.  The word 'insect' uses 'in-' to mean 'not'.</a:t>
             </a:r>
             <a:endParaRPr lang="en-US" sz="1300" dirty="0"/>
           </a:p>
@@ -37999,11 +37960,11 @@
             </a:avLst>
           </a:prstGeom>
           <a:solidFill>
-            <a:srgbClr val="DCFCE7"/>
-          </a:solidFill>
-          <a:ln w="12700">
-            <a:solidFill>
-              <a:srgbClr val="16A34A"/>
+            <a:srgbClr val="FEE2E2"/>
+          </a:solidFill>
+          <a:ln w="12700">
+            <a:solidFill>
+              <a:srgbClr val="DC2626"/>
             </a:solidFill>
             <a:prstDash val="solid"/>
           </a:ln>
@@ -38036,13 +37997,13 @@
             <a:r>
               <a:rPr lang="en-US" sz="1100" b="1" dirty="0">
                 <a:solidFill>
-                  <a:srgbClr val="16A34A"/>
+                  <a:srgbClr val="DC2626"/>
                 </a:solidFill>
                 <a:latin typeface="Trebuchet MS" pitchFamily="34" charset="0"/>
                 <a:ea typeface="Trebuchet MS" pitchFamily="34" charset="-122"/>
                 <a:cs typeface="Trebuchet MS" pitchFamily="34" charset="-120"/>
               </a:rPr>
-              <a:t>TRUE</a:t>
+              <a:t>FALSE</a:t>
             </a:r>
             <a:endParaRPr lang="en-US" sz="1100" dirty="0"/>
           </a:p>
@@ -38115,7 +38076,7 @@
                 <a:ea typeface="Calibri" pitchFamily="34" charset="-122"/>
                 <a:cs typeface="Calibri" pitchFamily="34" charset="-120"/>
               </a:rPr>
-              <a:t>2.  The word 'insect' uses 'in-' to mean 'not'.</a:t>
+              <a:t>2.  The prefix 'in-' can mean 'not' or 'without'.</a:t>
             </a:r>
             <a:endParaRPr lang="en-US" sz="1300" dirty="0"/>
           </a:p>
@@ -38138,11 +38099,11 @@
             </a:avLst>
           </a:prstGeom>
           <a:solidFill>
-            <a:srgbClr val="FEE2E2"/>
-          </a:solidFill>
-          <a:ln w="12700">
-            <a:solidFill>
-              <a:srgbClr val="DC2626"/>
+            <a:srgbClr val="DCFCE7"/>
+          </a:solidFill>
+          <a:ln w="12700">
+            <a:solidFill>
+              <a:srgbClr val="16A34A"/>
             </a:solidFill>
             <a:prstDash val="solid"/>
           </a:ln>
@@ -38175,13 +38136,13 @@
             <a:r>
               <a:rPr lang="en-US" sz="1100" b="1" dirty="0">
                 <a:solidFill>
-                  <a:srgbClr val="DC2626"/>
+                  <a:srgbClr val="16A34A"/>
                 </a:solidFill>
                 <a:latin typeface="Trebuchet MS" pitchFamily="34" charset="0"/>
                 <a:ea typeface="Trebuchet MS" pitchFamily="34" charset="-122"/>
                 <a:cs typeface="Trebuchet MS" pitchFamily="34" charset="-120"/>
               </a:rPr>
-              <a:t>FALSE</a:t>
+              <a:t>TRUE</a:t>
             </a:r>
             <a:endParaRPr lang="en-US" sz="1100" dirty="0"/>
           </a:p>
@@ -38254,7 +38215,7 @@
                 <a:ea typeface="Calibri" pitchFamily="34" charset="-122"/>
                 <a:cs typeface="Calibri" pitchFamily="34" charset="-120"/>
               </a:rPr>
-              <a:t>3.  All words beginning with 'in-' use the prefix meaning 'not'.</a:t>
+              <a:t>3.  The prefix 'in-' sometimes changes to 'im-' before letters like 'm' and 'p'.</a:t>
             </a:r>
             <a:endParaRPr lang="en-US" sz="1300" dirty="0"/>
           </a:p>
@@ -38277,11 +38238,11 @@
             </a:avLst>
           </a:prstGeom>
           <a:solidFill>
-            <a:srgbClr val="FEE2E2"/>
-          </a:solidFill>
-          <a:ln w="12700">
-            <a:solidFill>
-              <a:srgbClr val="DC2626"/>
+            <a:srgbClr val="DCFCE7"/>
+          </a:solidFill>
+          <a:ln w="12700">
+            <a:solidFill>
+              <a:srgbClr val="16A34A"/>
             </a:solidFill>
             <a:prstDash val="solid"/>
           </a:ln>
@@ -38314,13 +38275,13 @@
             <a:r>
               <a:rPr lang="en-US" sz="1100" b="1" dirty="0">
                 <a:solidFill>
-                  <a:srgbClr val="DC2626"/>
+                  <a:srgbClr val="16A34A"/>
                 </a:solidFill>
                 <a:latin typeface="Trebuchet MS" pitchFamily="34" charset="0"/>
                 <a:ea typeface="Trebuchet MS" pitchFamily="34" charset="-122"/>
                 <a:cs typeface="Trebuchet MS" pitchFamily="34" charset="-120"/>
               </a:rPr>
-              <a:t>FALSE</a:t>
+              <a:t>TRUE</a:t>
             </a:r>
             <a:endParaRPr lang="en-US" sz="1100" dirty="0"/>
           </a:p>
@@ -38393,7 +38354,7 @@
                 <a:ea typeface="Calibri" pitchFamily="34" charset="-122"/>
                 <a:cs typeface="Calibri" pitchFamily="34" charset="-120"/>
               </a:rPr>
-              <a:t>4.  The prefix 'in-' sometimes changes to 'im-' before letters like 'm' and 'p'.</a:t>
+              <a:t>4.  'Invisible' means something cannot be seen.</a:t>
             </a:r>
             <a:endParaRPr lang="en-US" sz="1300" dirty="0"/>
           </a:p>
@@ -38532,7 +38493,7 @@
                 <a:ea typeface="Calibri" pitchFamily="34" charset="-122"/>
                 <a:cs typeface="Calibri" pitchFamily="34" charset="-120"/>
               </a:rPr>
-              <a:t>5.  'Invisible' means something cannot be seen.</a:t>
+              <a:t>5.  All words beginning with 'in-' use the prefix meaning 'not'.</a:t>
             </a:r>
             <a:endParaRPr lang="en-US" sz="1300" dirty="0"/>
           </a:p>
@@ -38555,11 +38516,11 @@
             </a:avLst>
           </a:prstGeom>
           <a:solidFill>
-            <a:srgbClr val="DCFCE7"/>
-          </a:solidFill>
-          <a:ln w="12700">
-            <a:solidFill>
-              <a:srgbClr val="16A34A"/>
+            <a:srgbClr val="FEE2E2"/>
+          </a:solidFill>
+          <a:ln w="12700">
+            <a:solidFill>
+              <a:srgbClr val="DC2626"/>
             </a:solidFill>
             <a:prstDash val="solid"/>
           </a:ln>
@@ -38592,13 +38553,13 @@
             <a:r>
               <a:rPr lang="en-US" sz="1100" b="1" dirty="0">
                 <a:solidFill>
-                  <a:srgbClr val="16A34A"/>
+                  <a:srgbClr val="DC2626"/>
                 </a:solidFill>
                 <a:latin typeface="Trebuchet MS" pitchFamily="34" charset="0"/>
                 <a:ea typeface="Trebuchet MS" pitchFamily="34" charset="-122"/>
                 <a:cs typeface="Trebuchet MS" pitchFamily="34" charset="-120"/>
               </a:rPr>
-              <a:t>TRUE</a:t>
+              <a:t>FALSE</a:t>
             </a:r>
             <a:endParaRPr lang="en-US" sz="1100" dirty="0"/>
           </a:p>
